--- a/문서/사용설명서/IMS-DS16_LightController_사용설명서.pptx
+++ b/문서/사용설명서/IMS-DS16_LightController_사용설명서.pptx
@@ -328,7 +328,7 @@
           <a:p>
             <a:fld id="{5BCAD085-E8A6-8845-BD4E-CB4CCA059FC4}" type="datetimeFigureOut">
               <a:rPr lang="en-US" smtClean="0"/>
-              <a:t>3/31/2026</a:t>
+              <a:t>4/2/2026</a:t>
             </a:fld>
             <a:endParaRPr lang="en-US"/>
           </a:p>
@@ -496,7 +496,7 @@
           <a:p>
             <a:fld id="{5BCAD085-E8A6-8845-BD4E-CB4CCA059FC4}" type="datetimeFigureOut">
               <a:rPr lang="en-US" smtClean="0"/>
-              <a:t>3/31/2026</a:t>
+              <a:t>4/2/2026</a:t>
             </a:fld>
             <a:endParaRPr lang="en-US"/>
           </a:p>
@@ -674,7 +674,7 @@
           <a:p>
             <a:fld id="{5BCAD085-E8A6-8845-BD4E-CB4CCA059FC4}" type="datetimeFigureOut">
               <a:rPr lang="en-US" smtClean="0"/>
-              <a:t>3/31/2026</a:t>
+              <a:t>4/2/2026</a:t>
             </a:fld>
             <a:endParaRPr lang="en-US"/>
           </a:p>
@@ -842,7 +842,7 @@
           <a:p>
             <a:fld id="{5BCAD085-E8A6-8845-BD4E-CB4CCA059FC4}" type="datetimeFigureOut">
               <a:rPr lang="en-US" smtClean="0"/>
-              <a:t>3/31/2026</a:t>
+              <a:t>4/2/2026</a:t>
             </a:fld>
             <a:endParaRPr lang="en-US"/>
           </a:p>
@@ -1087,7 +1087,7 @@
           <a:p>
             <a:fld id="{5BCAD085-E8A6-8845-BD4E-CB4CCA059FC4}" type="datetimeFigureOut">
               <a:rPr lang="en-US" smtClean="0"/>
-              <a:t>3/31/2026</a:t>
+              <a:t>4/2/2026</a:t>
             </a:fld>
             <a:endParaRPr lang="en-US"/>
           </a:p>
@@ -1372,7 +1372,7 @@
           <a:p>
             <a:fld id="{5BCAD085-E8A6-8845-BD4E-CB4CCA059FC4}" type="datetimeFigureOut">
               <a:rPr lang="en-US" smtClean="0"/>
-              <a:t>3/31/2026</a:t>
+              <a:t>4/2/2026</a:t>
             </a:fld>
             <a:endParaRPr lang="en-US"/>
           </a:p>
@@ -1791,7 +1791,7 @@
           <a:p>
             <a:fld id="{5BCAD085-E8A6-8845-BD4E-CB4CCA059FC4}" type="datetimeFigureOut">
               <a:rPr lang="en-US" smtClean="0"/>
-              <a:t>3/31/2026</a:t>
+              <a:t>4/2/2026</a:t>
             </a:fld>
             <a:endParaRPr lang="en-US"/>
           </a:p>
@@ -1908,7 +1908,7 @@
           <a:p>
             <a:fld id="{5BCAD085-E8A6-8845-BD4E-CB4CCA059FC4}" type="datetimeFigureOut">
               <a:rPr lang="en-US" smtClean="0"/>
-              <a:t>3/31/2026</a:t>
+              <a:t>4/2/2026</a:t>
             </a:fld>
             <a:endParaRPr lang="en-US"/>
           </a:p>
@@ -2003,7 +2003,7 @@
           <a:p>
             <a:fld id="{5BCAD085-E8A6-8845-BD4E-CB4CCA059FC4}" type="datetimeFigureOut">
               <a:rPr lang="en-US" smtClean="0"/>
-              <a:t>3/31/2026</a:t>
+              <a:t>4/2/2026</a:t>
             </a:fld>
             <a:endParaRPr lang="en-US"/>
           </a:p>
@@ -2278,7 +2278,7 @@
           <a:p>
             <a:fld id="{5BCAD085-E8A6-8845-BD4E-CB4CCA059FC4}" type="datetimeFigureOut">
               <a:rPr lang="en-US" smtClean="0"/>
-              <a:t>3/31/2026</a:t>
+              <a:t>4/2/2026</a:t>
             </a:fld>
             <a:endParaRPr lang="en-US"/>
           </a:p>
@@ -2530,7 +2530,7 @@
           <a:p>
             <a:fld id="{5BCAD085-E8A6-8845-BD4E-CB4CCA059FC4}" type="datetimeFigureOut">
               <a:rPr lang="en-US" smtClean="0"/>
-              <a:t>3/31/2026</a:t>
+              <a:t>4/2/2026</a:t>
             </a:fld>
             <a:endParaRPr lang="en-US"/>
           </a:p>
@@ -2741,7 +2741,7 @@
           <a:p>
             <a:fld id="{5BCAD085-E8A6-8845-BD4E-CB4CCA059FC4}" type="datetimeFigureOut">
               <a:rPr lang="en-US" smtClean="0"/>
-              <a:t>3/31/2026</a:t>
+              <a:t>4/2/2026</a:t>
             </a:fld>
             <a:endParaRPr lang="en-US"/>
           </a:p>
@@ -13376,10 +13376,10 @@
       </p:sp>
       <p:pic>
         <p:nvPicPr>
-          <p:cNvPr id="18" name="그림 17">
+          <p:cNvPr id="17" name="그림 16">
             <a:extLst>
               <a:ext uri="{FF2B5EF4-FFF2-40B4-BE49-F238E27FC236}">
-                <a16:creationId xmlns:a16="http://schemas.microsoft.com/office/drawing/2014/main" id="{80A1DE8B-8952-40ED-627A-D56586C4D59B}"/>
+                <a16:creationId xmlns:a16="http://schemas.microsoft.com/office/drawing/2014/main" id="{30042CF8-9F25-2076-24D3-6C43635C674E}"/>
               </a:ext>
             </a:extLst>
           </p:cNvPr>
@@ -13396,8 +13396,8 @@
         </p:blipFill>
         <p:spPr>
           <a:xfrm>
-            <a:off x="873938" y="1371600"/>
-            <a:ext cx="4773526" cy="4591811"/>
+            <a:off x="908001" y="1665699"/>
+            <a:ext cx="5022120" cy="3871161"/>
           </a:xfrm>
           <a:prstGeom prst="rect">
             <a:avLst/>
